--- a/templates/posts/october/2026-10-24-sat-ig-carbon-3-ways.pptx
+++ b/templates/posts/october/2026-10-24-sat-ig-carbon-3-ways.pptx
@@ -3802,7 +3802,7 @@
       <p:grpSpPr/>
       <p:pic>
         <p:nvPicPr>
-          <p:cNvPr id="2" name="Picture 1" descr="2789777316264814774.jpg"/>
+          <p:cNvPr id="2" name="Picture 1" descr="6649492560247297558.jpg"/>
           <p:cNvPicPr>
             <a:picLocks noChangeAspect="1"/>
           </p:cNvPicPr>
@@ -4178,7 +4178,7 @@
       </p:sp>
       <p:pic>
         <p:nvPicPr>
-          <p:cNvPr id="4" name="Picture 3" descr="1367126669425910712.jpg"/>
+          <p:cNvPr id="4" name="Picture 3" descr="4413939312860615074.jpg"/>
           <p:cNvPicPr>
             <a:picLocks noChangeAspect="1"/>
           </p:cNvPicPr>
@@ -4351,7 +4351,7 @@
       </p:sp>
       <p:pic>
         <p:nvPicPr>
-          <p:cNvPr id="4" name="Picture 3" descr="7232604400782376644.jpg"/>
+          <p:cNvPr id="4" name="Picture 3" descr="5302438266867332527.jpg"/>
           <p:cNvPicPr>
             <a:picLocks noChangeAspect="1"/>
           </p:cNvPicPr>

--- a/templates/posts/october/2026-10-24-sat-ig-carbon-3-ways.pptx
+++ b/templates/posts/october/2026-10-24-sat-ig-carbon-3-ways.pptx
@@ -3802,7 +3802,7 @@
       <p:grpSpPr/>
       <p:pic>
         <p:nvPicPr>
-          <p:cNvPr id="2" name="Picture 1" descr="6649492560247297558.jpg"/>
+          <p:cNvPr id="2" name="Picture 1" descr="2728313363988860767.jpg"/>
           <p:cNvPicPr>
             <a:picLocks noChangeAspect="1"/>
           </p:cNvPicPr>
@@ -4178,7 +4178,7 @@
       </p:sp>
       <p:pic>
         <p:nvPicPr>
-          <p:cNvPr id="4" name="Picture 3" descr="4413939312860615074.jpg"/>
+          <p:cNvPr id="4" name="Picture 3" descr="3658017974276612436.jpg"/>
           <p:cNvPicPr>
             <a:picLocks noChangeAspect="1"/>
           </p:cNvPicPr>
@@ -4351,7 +4351,7 @@
       </p:sp>
       <p:pic>
         <p:nvPicPr>
-          <p:cNvPr id="4" name="Picture 3" descr="5302438266867332527.jpg"/>
+          <p:cNvPr id="4" name="Picture 3" descr="6071680000905388305.jpg"/>
           <p:cNvPicPr>
             <a:picLocks noChangeAspect="1"/>
           </p:cNvPicPr>

--- a/templates/posts/october/2026-10-24-sat-ig-carbon-3-ways.pptx
+++ b/templates/posts/october/2026-10-24-sat-ig-carbon-3-ways.pptx
@@ -3802,7 +3802,7 @@
       <p:grpSpPr/>
       <p:pic>
         <p:nvPicPr>
-          <p:cNvPr id="2" name="Picture 1" descr="2728313363988860767.jpg"/>
+          <p:cNvPr id="2" name="Picture 1" descr="5467671056337994868.jpg"/>
           <p:cNvPicPr>
             <a:picLocks noChangeAspect="1"/>
           </p:cNvPicPr>
@@ -4178,7 +4178,7 @@
       </p:sp>
       <p:pic>
         <p:nvPicPr>
-          <p:cNvPr id="4" name="Picture 3" descr="3658017974276612436.jpg"/>
+          <p:cNvPr id="4" name="Picture 3" descr="1583890393715488846.jpg"/>
           <p:cNvPicPr>
             <a:picLocks noChangeAspect="1"/>
           </p:cNvPicPr>
@@ -4351,7 +4351,7 @@
       </p:sp>
       <p:pic>
         <p:nvPicPr>
-          <p:cNvPr id="4" name="Picture 3" descr="6071680000905388305.jpg"/>
+          <p:cNvPr id="4" name="Picture 3" descr="6277139425910807141.jpg"/>
           <p:cNvPicPr>
             <a:picLocks noChangeAspect="1"/>
           </p:cNvPicPr>

--- a/templates/posts/october/2026-10-24-sat-ig-carbon-3-ways.pptx
+++ b/templates/posts/october/2026-10-24-sat-ig-carbon-3-ways.pptx
@@ -3802,7 +3802,7 @@
       <p:grpSpPr/>
       <p:pic>
         <p:nvPicPr>
-          <p:cNvPr id="2" name="Picture 1" descr="5467671056337994868.jpg"/>
+          <p:cNvPr id="2" name="Picture 1" descr="5839301989467293268.jpg"/>
           <p:cNvPicPr>
             <a:picLocks noChangeAspect="1"/>
           </p:cNvPicPr>
@@ -4178,7 +4178,7 @@
       </p:sp>
       <p:pic>
         <p:nvPicPr>
-          <p:cNvPr id="4" name="Picture 3" descr="1583890393715488846.jpg"/>
+          <p:cNvPr id="4" name="Picture 3" descr="7326082186428940316.jpg"/>
           <p:cNvPicPr>
             <a:picLocks noChangeAspect="1"/>
           </p:cNvPicPr>
@@ -4351,7 +4351,7 @@
       </p:sp>
       <p:pic>
         <p:nvPicPr>
-          <p:cNvPr id="4" name="Picture 3" descr="6277139425910807141.jpg"/>
+          <p:cNvPr id="4" name="Picture 3" descr="3128633752325745867.jpg"/>
           <p:cNvPicPr>
             <a:picLocks noChangeAspect="1"/>
           </p:cNvPicPr>

--- a/templates/posts/october/2026-10-24-sat-ig-carbon-3-ways.pptx
+++ b/templates/posts/october/2026-10-24-sat-ig-carbon-3-ways.pptx
@@ -3802,7 +3802,7 @@
       <p:grpSpPr/>
       <p:pic>
         <p:nvPicPr>
-          <p:cNvPr id="2" name="Picture 1" descr="5839301989467293268.jpg"/>
+          <p:cNvPr id="2" name="Picture 1" descr="1825675057723730407.jpg"/>
           <p:cNvPicPr>
             <a:picLocks noChangeAspect="1"/>
           </p:cNvPicPr>
@@ -3946,92 +3946,33 @@
           </a:p>
         </p:txBody>
       </p:sp>
-      <p:sp>
-        <p:nvSpPr>
-          <p:cNvPr id="6" name="Oval 5"/>
-          <p:cNvSpPr/>
+      <p:pic>
+        <p:nvPicPr>
+          <p:cNvPr id="6" name="Picture 5" descr="foundation-logo-white.png"/>
+          <p:cNvPicPr>
+            <a:picLocks noChangeAspect="1"/>
+          </p:cNvPicPr>
           <p:nvPr/>
-        </p:nvSpPr>
+        </p:nvPicPr>
+        <p:blipFill>
+          <a:blip r:embed="rId4"/>
+          <a:stretch>
+            <a:fillRect/>
+          </a:stretch>
+        </p:blipFill>
         <p:spPr>
           <a:xfrm>
-            <a:off x="8667750" y="11239500"/>
-            <a:ext cx="857250" cy="857250"/>
-          </a:xfrm>
-          <a:prstGeom prst="ellipse">
-            <a:avLst/>
-          </a:prstGeom>
-          <a:noFill/>
-          <a:ln w="19050">
-            <a:solidFill>
-              <a:srgbClr val="F4F1EA"/>
-            </a:solidFill>
-          </a:ln>
-          <a:effectLst/>
-        </p:spPr>
-        <p:style>
-          <a:lnRef idx="1">
-            <a:schemeClr val="accent1"/>
-          </a:lnRef>
-          <a:fillRef idx="3">
-            <a:schemeClr val="accent1"/>
-          </a:fillRef>
-          <a:effectRef idx="2">
-            <a:schemeClr val="accent1"/>
-          </a:effectRef>
-          <a:fontRef idx="minor">
-            <a:schemeClr val="lt1"/>
-          </a:fontRef>
-        </p:style>
-        <p:txBody>
-          <a:bodyPr rtlCol="0" anchor="ctr"/>
-          <a:lstStyle/>
-          <a:p>
-            <a:pPr algn="ctr"/>
-          </a:p>
-        </p:txBody>
-      </p:sp>
-      <p:sp>
-        <p:nvSpPr>
-          <p:cNvPr id="7" name="TextBox 6"/>
-          <p:cNvSpPr txBox="1"/>
-          <p:nvPr/>
-        </p:nvSpPr>
-        <p:spPr>
-          <a:xfrm>
-            <a:off x="8667750" y="11239500"/>
-            <a:ext cx="857250" cy="857250"/>
+            <a:off x="8571501" y="11239500"/>
+            <a:ext cx="953498" cy="857250"/>
           </a:xfrm>
           <a:prstGeom prst="rect">
             <a:avLst/>
           </a:prstGeom>
-          <a:noFill/>
         </p:spPr>
-        <p:txBody>
-          <a:bodyPr wrap="square" lIns="0" rIns="0" tIns="0" bIns="0" anchor="ctr">
-            <a:spAutoFit/>
-          </a:bodyPr>
-          <a:lstStyle/>
-          <a:p>
-            <a:pPr algn="ctr">
-              <a:lnSpc>
-                <a:spcPct val="120000"/>
-              </a:lnSpc>
-            </a:pPr>
-            <a:r>
-              <a:rPr sz="1800" b="1" i="0">
-                <a:solidFill>
-                  <a:srgbClr val="F4F1EA"/>
-                </a:solidFill>
-                <a:latin typeface="Montserrat"/>
-              </a:rPr>
-              <a:t>LOGO</a:t>
-            </a:r>
-          </a:p>
-        </p:txBody>
-      </p:sp>
-      <p:sp>
-        <p:nvSpPr>
-          <p:cNvPr id="8" name="TextBox 7"/>
+      </p:pic>
+      <p:sp>
+        <p:nvSpPr>
+          <p:cNvPr id="7" name="TextBox 6"/>
           <p:cNvSpPr txBox="1"/>
           <p:nvPr/>
         </p:nvSpPr>
@@ -4178,7 +4119,7 @@
       </p:sp>
       <p:pic>
         <p:nvPicPr>
-          <p:cNvPr id="4" name="Picture 3" descr="7326082186428940316.jpg"/>
+          <p:cNvPr id="4" name="Picture 3" descr="4022705057641180214.jpg"/>
           <p:cNvPicPr>
             <a:picLocks noChangeAspect="1"/>
           </p:cNvPicPr>
@@ -4351,7 +4292,7 @@
       </p:sp>
       <p:pic>
         <p:nvPicPr>
-          <p:cNvPr id="4" name="Picture 3" descr="3128633752325745867.jpg"/>
+          <p:cNvPr id="4" name="Picture 3" descr="8369882048477192710.jpg"/>
           <p:cNvPicPr>
             <a:picLocks noChangeAspect="1"/>
           </p:cNvPicPr>
@@ -5054,92 +4995,33 @@
           </a:p>
         </p:txBody>
       </p:sp>
-      <p:sp>
-        <p:nvSpPr>
-          <p:cNvPr id="9" name="Oval 8"/>
-          <p:cNvSpPr/>
+      <p:pic>
+        <p:nvPicPr>
+          <p:cNvPr id="9" name="Picture 8" descr="foundation-logo-white.png"/>
+          <p:cNvPicPr>
+            <a:picLocks noChangeAspect="1"/>
+          </p:cNvPicPr>
           <p:nvPr/>
-        </p:nvSpPr>
+        </p:nvPicPr>
+        <p:blipFill>
+          <a:blip r:embed="rId3"/>
+          <a:stretch>
+            <a:fillRect/>
+          </a:stretch>
+        </p:blipFill>
         <p:spPr>
           <a:xfrm>
-            <a:off x="8667750" y="11239500"/>
-            <a:ext cx="857250" cy="857250"/>
-          </a:xfrm>
-          <a:prstGeom prst="ellipse">
-            <a:avLst/>
-          </a:prstGeom>
-          <a:noFill/>
-          <a:ln w="19050">
-            <a:solidFill>
-              <a:srgbClr val="F4F1EA"/>
-            </a:solidFill>
-          </a:ln>
-          <a:effectLst/>
-        </p:spPr>
-        <p:style>
-          <a:lnRef idx="1">
-            <a:schemeClr val="accent1"/>
-          </a:lnRef>
-          <a:fillRef idx="3">
-            <a:schemeClr val="accent1"/>
-          </a:fillRef>
-          <a:effectRef idx="2">
-            <a:schemeClr val="accent1"/>
-          </a:effectRef>
-          <a:fontRef idx="minor">
-            <a:schemeClr val="lt1"/>
-          </a:fontRef>
-        </p:style>
-        <p:txBody>
-          <a:bodyPr rtlCol="0" anchor="ctr"/>
-          <a:lstStyle/>
-          <a:p>
-            <a:pPr algn="ctr"/>
-          </a:p>
-        </p:txBody>
-      </p:sp>
-      <p:sp>
-        <p:nvSpPr>
-          <p:cNvPr id="10" name="TextBox 9"/>
-          <p:cNvSpPr txBox="1"/>
-          <p:nvPr/>
-        </p:nvSpPr>
-        <p:spPr>
-          <a:xfrm>
-            <a:off x="8667750" y="11239500"/>
-            <a:ext cx="857250" cy="857250"/>
+            <a:off x="8571501" y="11239500"/>
+            <a:ext cx="953498" cy="857250"/>
           </a:xfrm>
           <a:prstGeom prst="rect">
             <a:avLst/>
           </a:prstGeom>
-          <a:noFill/>
         </p:spPr>
-        <p:txBody>
-          <a:bodyPr wrap="square" lIns="0" rIns="0" tIns="0" bIns="0" anchor="ctr">
-            <a:spAutoFit/>
-          </a:bodyPr>
-          <a:lstStyle/>
-          <a:p>
-            <a:pPr algn="ctr">
-              <a:lnSpc>
-                <a:spcPct val="120000"/>
-              </a:lnSpc>
-            </a:pPr>
-            <a:r>
-              <a:rPr sz="1800" b="1" i="0">
-                <a:solidFill>
-                  <a:srgbClr val="F4F1EA"/>
-                </a:solidFill>
-                <a:latin typeface="Montserrat"/>
-              </a:rPr>
-              <a:t>LOGO</a:t>
-            </a:r>
-          </a:p>
-        </p:txBody>
-      </p:sp>
-      <p:sp>
-        <p:nvSpPr>
-          <p:cNvPr id="11" name="TextBox 10"/>
+      </p:pic>
+      <p:sp>
+        <p:nvSpPr>
+          <p:cNvPr id="10" name="TextBox 9"/>
           <p:cNvSpPr txBox="1"/>
           <p:nvPr/>
         </p:nvSpPr>

--- a/templates/posts/october/2026-10-24-sat-ig-carbon-3-ways.pptx
+++ b/templates/posts/october/2026-10-24-sat-ig-carbon-3-ways.pptx
@@ -3788,7 +3788,7 @@
     <p:bg>
       <p:bgPr>
         <a:solidFill>
-          <a:srgbClr val="22371F"/>
+          <a:srgbClr val="1E3F1D"/>
         </a:solidFill>
         <a:effectLst/>
       </p:bgPr>
@@ -3802,7 +3802,7 @@
       <p:grpSpPr/>
       <p:pic>
         <p:nvPicPr>
-          <p:cNvPr id="2" name="Picture 1" descr="1825675057723730407.jpg"/>
+          <p:cNvPr id="2" name="Picture 1" descr="7265144072501938179.jpg"/>
           <p:cNvPicPr>
             <a:picLocks noChangeAspect="1"/>
           </p:cNvPicPr>
@@ -3839,7 +3839,7 @@
             <a:avLst/>
           </a:prstGeom>
           <a:solidFill>
-            <a:srgbClr val="DBE6A7"/>
+            <a:srgbClr val="B1BCB1"/>
           </a:solidFill>
           <a:ln>
             <a:noFill/>
@@ -3898,7 +3898,7 @@
             <a:r>
               <a:rPr sz="2200" b="1" i="0" spc="200">
                 <a:solidFill>
-                  <a:srgbClr val="DBE6A7"/>
+                  <a:srgbClr val="B1BCB1"/>
                 </a:solidFill>
                 <a:latin typeface="Montserrat"/>
               </a:rPr>
@@ -3937,7 +3937,7 @@
             <a:r>
               <a:rPr sz="6400" b="1" i="0">
                 <a:solidFill>
-                  <a:srgbClr val="F4F1EA"/>
+                  <a:srgbClr val="F3F1EA"/>
                 </a:solidFill>
                 <a:latin typeface="Montserrat"/>
               </a:rPr>
@@ -4000,7 +4000,7 @@
             <a:r>
               <a:rPr sz="2000" b="0" i="0">
                 <a:solidFill>
-                  <a:srgbClr val="F4F1EA">
+                  <a:srgbClr val="F3F1EA">
                     <a:alpha val="60000"/>
                   </a:srgbClr>
                 </a:solidFill>
@@ -4025,7 +4025,7 @@
     <p:bg>
       <p:bgPr>
         <a:solidFill>
-          <a:srgbClr val="F4F1EA"/>
+          <a:srgbClr val="F3F1EA"/>
         </a:solidFill>
         <a:effectLst/>
       </p:bgPr>
@@ -4067,7 +4067,7 @@
             <a:r>
               <a:rPr sz="14000" b="1" i="0">
                 <a:solidFill>
-                  <a:srgbClr val="156826">
+                  <a:srgbClr val="31662F">
                     <a:alpha val="25000"/>
                   </a:srgbClr>
                 </a:solidFill>
@@ -4108,7 +4108,7 @@
             <a:r>
               <a:rPr sz="4600" b="1" i="0">
                 <a:solidFill>
-                  <a:srgbClr val="22371F"/>
+                  <a:srgbClr val="1E3F1D"/>
                 </a:solidFill>
                 <a:latin typeface="Montserrat"/>
               </a:rPr>
@@ -4119,7 +4119,7 @@
       </p:sp>
       <p:pic>
         <p:nvPicPr>
-          <p:cNvPr id="4" name="Picture 3" descr="4022705057641180214.jpg"/>
+          <p:cNvPr id="4" name="Picture 3" descr="169974034446433676.jpg"/>
           <p:cNvPicPr>
             <a:picLocks noChangeAspect="1"/>
           </p:cNvPicPr>
@@ -4198,7 +4198,7 @@
     <p:bg>
       <p:bgPr>
         <a:solidFill>
-          <a:srgbClr val="F4F1EA"/>
+          <a:srgbClr val="F3F1EA"/>
         </a:solidFill>
         <a:effectLst/>
       </p:bgPr>
@@ -4240,7 +4240,7 @@
             <a:r>
               <a:rPr sz="14000" b="1" i="0">
                 <a:solidFill>
-                  <a:srgbClr val="156826">
+                  <a:srgbClr val="31662F">
                     <a:alpha val="25000"/>
                   </a:srgbClr>
                 </a:solidFill>
@@ -4281,7 +4281,7 @@
             <a:r>
               <a:rPr sz="4600" b="1" i="0">
                 <a:solidFill>
-                  <a:srgbClr val="22371F"/>
+                  <a:srgbClr val="1E3F1D"/>
                 </a:solidFill>
                 <a:latin typeface="Montserrat"/>
               </a:rPr>
@@ -4292,7 +4292,7 @@
       </p:sp>
       <p:pic>
         <p:nvPicPr>
-          <p:cNvPr id="4" name="Picture 3" descr="8369882048477192710.jpg"/>
+          <p:cNvPr id="4" name="Picture 3" descr="5879884701072223837.jpg"/>
           <p:cNvPicPr>
             <a:picLocks noChangeAspect="1"/>
           </p:cNvPicPr>
@@ -4371,7 +4371,7 @@
     <p:bg>
       <p:bgPr>
         <a:solidFill>
-          <a:srgbClr val="F4F1EA"/>
+          <a:srgbClr val="F3F1EA"/>
         </a:solidFill>
         <a:effectLst/>
       </p:bgPr>
@@ -4413,7 +4413,7 @@
             <a:r>
               <a:rPr sz="14000" b="1" i="0">
                 <a:solidFill>
-                  <a:srgbClr val="156826">
+                  <a:srgbClr val="31662F">
                     <a:alpha val="25000"/>
                   </a:srgbClr>
                 </a:solidFill>
@@ -4454,7 +4454,7 @@
             <a:r>
               <a:rPr sz="4600" b="1" i="0">
                 <a:solidFill>
-                  <a:srgbClr val="22371F"/>
+                  <a:srgbClr val="1E3F1D"/>
                 </a:solidFill>
                 <a:latin typeface="Montserrat"/>
               </a:rPr>
@@ -4603,7 +4603,7 @@
     <p:bg>
       <p:bgPr>
         <a:solidFill>
-          <a:srgbClr val="156826"/>
+          <a:srgbClr val="31662F"/>
         </a:solidFill>
         <a:effectLst/>
       </p:bgPr>
@@ -4645,7 +4645,7 @@
             <a:r>
               <a:rPr sz="5400" b="1" i="0">
                 <a:solidFill>
-                  <a:srgbClr val="F4F1EA"/>
+                  <a:srgbClr val="F3F1EA"/>
                 </a:solidFill>
                 <a:latin typeface="Montserrat"/>
               </a:rPr>
@@ -4693,7 +4693,7 @@
             </a:pathLst>
           </a:custGeom>
           <a:solidFill>
-            <a:srgbClr val="F4F1EA"/>
+            <a:srgbClr val="F3F1EA"/>
           </a:solidFill>
           <a:ln>
             <a:noFill/>
@@ -4761,7 +4761,7 @@
             </a:pathLst>
           </a:custGeom>
           <a:solidFill>
-            <a:srgbClr val="156826"/>
+            <a:srgbClr val="31662F"/>
           </a:solidFill>
           <a:ln>
             <a:noFill/>
@@ -4820,7 +4820,7 @@
             <a:r>
               <a:rPr sz="2200" b="1" i="0">
                 <a:solidFill>
-                  <a:srgbClr val="F4F1EA"/>
+                  <a:srgbClr val="F3F1EA"/>
                 </a:solidFill>
                 <a:latin typeface="Montserrat"/>
               </a:rPr>
@@ -4865,7 +4865,7 @@
             </a:pathLst>
           </a:custGeom>
           <a:solidFill>
-            <a:srgbClr val="F4F1EA"/>
+            <a:srgbClr val="F3F1EA"/>
           </a:solidFill>
           <a:ln>
             <a:noFill/>
@@ -4927,7 +4927,7 @@
             </a:pathLst>
           </a:custGeom>
           <a:solidFill>
-            <a:srgbClr val="156826"/>
+            <a:srgbClr val="31662F"/>
           </a:solidFill>
           <a:ln>
             <a:noFill/>
@@ -4986,7 +4986,7 @@
             <a:r>
               <a:rPr sz="2200" b="1" i="0">
                 <a:solidFill>
-                  <a:srgbClr val="F4F1EA"/>
+                  <a:srgbClr val="F3F1EA"/>
                 </a:solidFill>
                 <a:latin typeface="Montserrat"/>
               </a:rPr>
@@ -5049,7 +5049,7 @@
             <a:r>
               <a:rPr sz="2000" b="0" i="0">
                 <a:solidFill>
-                  <a:srgbClr val="F4F1EA">
+                  <a:srgbClr val="F3F1EA">
                     <a:alpha val="60000"/>
                   </a:srgbClr>
                 </a:solidFill>

--- a/templates/posts/october/2026-10-24-sat-ig-carbon-3-ways.pptx
+++ b/templates/posts/october/2026-10-24-sat-ig-carbon-3-ways.pptx
@@ -3802,7 +3802,7 @@
       <p:grpSpPr/>
       <p:pic>
         <p:nvPicPr>
-          <p:cNvPr id="2" name="Picture 1" descr="7265144072501938179.jpg"/>
+          <p:cNvPr id="2" name="Picture 1" descr="3213960068324440831.jpg"/>
           <p:cNvPicPr>
             <a:picLocks noChangeAspect="1"/>
           </p:cNvPicPr>
@@ -4119,7 +4119,7 @@
       </p:sp>
       <p:pic>
         <p:nvPicPr>
-          <p:cNvPr id="4" name="Picture 3" descr="169974034446433676.jpg"/>
+          <p:cNvPr id="4" name="Picture 3" descr="4296928030340693703.jpg"/>
           <p:cNvPicPr>
             <a:picLocks noChangeAspect="1"/>
           </p:cNvPicPr>
@@ -4292,7 +4292,7 @@
       </p:sp>
       <p:pic>
         <p:nvPicPr>
-          <p:cNvPr id="4" name="Picture 3" descr="5879884701072223837.jpg"/>
+          <p:cNvPr id="4" name="Picture 3" descr="8900582282029843517.jpg"/>
           <p:cNvPicPr>
             <a:picLocks noChangeAspect="1"/>
           </p:cNvPicPr>
